--- a/dist/초1/사회·역사/가족과생활/초1_사회·역사_가족과생활_02_나의하루.pptx
+++ b/dist/초1/사회·역사/가족과생활/초1_사회·역사_가족과생활_02_나의하루.pptx
@@ -119,39 +119,39 @@
   <p:extLst>
     <p:ext uri="{521415D9-36F7-43E2-AB2F-B90AF26B5E84}">
       <p14:sectionLst xmlns:p14="http://schemas.microsoft.com/office/powerpoint/2010/main">
-        <p14:section name="도입" id="{56eebed7-73db-2aa4-d5e4-bc91b733f826}">
+        <p14:section name="도입" id="{7d0b5e28-225a-826e-329d-51fba949a2bf}">
           <p14:sldIdLst>
             <p14:sldId id="256"/>
             <p14:sldId id="257"/>
           </p14:sldIdLst>
         </p14:section>
-        <p14:section name="개념" id="{1606cb13-6e02-38d6-e5d0-73677d06aacf}">
+        <p14:section name="개념" id="{87c934e7-93af-9ef5-3e57-f90f66732bfc}">
           <p14:sldIdLst>
             <p14:sldId id="258"/>
             <p14:sldId id="259"/>
             <p14:sldId id="260"/>
           </p14:sldIdLst>
         </p14:section>
-        <p14:section name="연습" id="{e2673ab0-d747-3aec-7f70-0b0551257b0e}">
+        <p14:section name="연습" id="{aa1221ca-76fc-bddc-54a2-141fc69689ef}">
           <p14:sldIdLst>
             <p14:sldId id="261"/>
             <p14:sldId id="262"/>
             <p14:sldId id="263"/>
           </p14:sldIdLst>
         </p14:section>
-        <p14:section name="확인" id="{4c5955ca-5147-50ee-dcb2-e8ca8868ce03}">
+        <p14:section name="확인" id="{012b54cf-2f64-9322-49fd-c29f61a3bfa0}">
           <p14:sldIdLst>
             <p14:sldId id="264"/>
             <p14:sldId id="265"/>
             <p14:sldId id="266"/>
           </p14:sldIdLst>
         </p14:section>
-        <p14:section name="정리" id="{1e726fab-6010-31f9-75e1-a38496672b2d}">
+        <p14:section name="정리" id="{1d2f7378-5c89-59a4-5b21-10c34ab4ca7c}">
           <p14:sldIdLst>
             <p14:sldId id="267"/>
           </p14:sldIdLst>
         </p14:section>
-        <p14:section name="보충" id="{e90091bd-4015-b53d-9d16-bfc7a9930171}">
+        <p14:section name="보충" id="{b209f34c-f7e8-80d5-c948-a4fb0dde65f9}">
           <p14:sldIdLst>
             <p14:sldId id="268"/>
           </p14:sldIdLst>
